--- a/docs/pptx/auc3/jx-auc3-linsubhr-egfrdisc-death.pptx
+++ b/docs/pptx/auc3/jx-auc3-linsubhr-egfrdisc-death.pptx
@@ -4824,7 +4824,7 @@
           <p:spPr>
             <a:xfrm>
               <a:off x="817517" y="1896563"/>
-              <a:ext cx="4685659" cy="82021"/>
+              <a:ext cx="5600608" cy="82021"/>
             </a:xfrm>
             <a:prstGeom prst="rect">
               <a:avLst/>
@@ -4856,7 +4856,7 @@
                   <a:latin typeface="Helvetica"/>
                   <a:cs typeface="Helvetica"/>
                 </a:rPr>
-                <a:t>HR per 1 mL/min: 0.92 (0.89-0.96)  |  per IQR (Δ = 22.8): 0.17 (0.06-0.43)  |  IQR: [-13.3, 9.5]</a:t>
+                <a:t>HR per 10 mL/min decline: 2.19 (1.44-3.34)  |  per IQR decline (Δ = 22.8): 6.00 (2.30-15.62)  |  IQR: [-13.3, 9.5]</a:t>
               </a:r>
             </a:p>
           </p:txBody>

--- a/docs/pptx/auc3/jx-auc3-linsubhr-egfrdisc-death.pptx
+++ b/docs/pptx/auc3/jx-auc3-linsubhr-egfrdisc-death.pptx
@@ -4824,7 +4824,7 @@
           <p:spPr>
             <a:xfrm>
               <a:off x="817517" y="1896563"/>
-              <a:ext cx="5600608" cy="82021"/>
+              <a:ext cx="6210513" cy="82021"/>
             </a:xfrm>
             <a:prstGeom prst="rect">
               <a:avLst/>
@@ -4856,7 +4856,7 @@
                   <a:latin typeface="Helvetica"/>
                   <a:cs typeface="Helvetica"/>
                 </a:rPr>
-                <a:t>HR per 10 mL/min decline: 2.19 (1.44-3.34)  |  per IQR decline (Δ = 22.8): 6.00 (2.30-15.62)  |  IQR: [-13.3, 9.5]</a:t>
+                <a:t>HR per 10 mL/min decline: 2.19 (1.44-3.34), p = &lt;0.001  |  per IQR decline (Δ = 22.8): 6.00 (2.30-15.62)  |  IQR: [-13.3, 9.5]</a:t>
               </a:r>
             </a:p>
           </p:txBody>

--- a/docs/pptx/auc3/jx-auc3-linsubhr-egfrdisc-death.pptx
+++ b/docs/pptx/auc3/jx-auc3-linsubhr-egfrdisc-death.pptx
@@ -4824,7 +4824,7 @@
           <p:spPr>
             <a:xfrm>
               <a:off x="817517" y="1896563"/>
-              <a:ext cx="6210513" cy="82021"/>
+              <a:ext cx="6807525" cy="82021"/>
             </a:xfrm>
             <a:prstGeom prst="rect">
               <a:avLst/>
@@ -4856,7 +4856,7 @@
                   <a:latin typeface="Helvetica"/>
                   <a:cs typeface="Helvetica"/>
                 </a:rPr>
-                <a:t>HR per 10 mL/min decline: 2.19 (1.44-3.34), p = &lt;0.001  |  per IQR decline (Δ = 22.8): 6.00 (2.30-15.62)  |  IQR: [-13.3, 9.5]</a:t>
+                <a:t>HR per 10 mL/min decline: 2.19 (1.44-3.34), p_Bonf = 0.001 (n = 6)  |  per IQR decline (Δ = 22.8): 6.00 (2.30-15.62)  |  IQR: [-13.3, 9.5]</a:t>
               </a:r>
             </a:p>
           </p:txBody>
